--- a/generated/Tier 1 Broker Scorecards/Surefire Insurance Agency Corp._Broker_Scorecard.pptx
+++ b/generated/Tier 1 Broker Scorecards/Surefire Insurance Agency Corp._Broker_Scorecard.pptx
@@ -3394,7 +3394,7 @@
                         <a:rPr sz="900">
                           <a:latin typeface="Segoe UI"/>
                         </a:rPr>
-                        <a:t>Tier 1  |  24.29% / 15.00%</a:t>
+                        <a:t>Tier 1  |  23.57% / 15.00%</a:t>
                       </a:r>
                     </a:p>
                   </a:txBody>
@@ -3653,7 +3653,7 @@
                         <a:rPr sz="900">
                           <a:latin typeface="Segoe UI"/>
                         </a:rPr>
-                        <a:t>Fleet Subs: 41  |  Binds: 13</a:t>
+                        <a:t>Fleet Subs: 42  |  Binds: 13</a:t>
                       </a:r>
                     </a:p>
                   </a:txBody>
@@ -3690,7 +3690,7 @@
                         <a:rPr sz="900">
                           <a:latin typeface="Segoe UI"/>
                         </a:rPr>
-                        <a:t>Fleet Bound Premium: $591,569.34</a:t>
+                        <a:t>Fleet Bound Premium: $597,297.53</a:t>
                       </a:r>
                     </a:p>
                   </a:txBody>
@@ -3727,7 +3727,7 @@
                         <a:rPr sz="900">
                           <a:latin typeface="Segoe UI"/>
                         </a:rPr>
-                        <a:t>Fleet Book %: 70.1%</a:t>
+                        <a:t>Fleet Book %: 70.8%</a:t>
                       </a:r>
                     </a:p>
                   </a:txBody>
@@ -3766,7 +3766,7 @@
                         <a:rPr sz="900">
                           <a:latin typeface="Segoe UI"/>
                         </a:rPr>
-                        <a:t>Non-Fleet Subs: 99  |  Binds: 21</a:t>
+                        <a:t>Non-Fleet Subs: 98  |  Binds: 20</a:t>
                       </a:r>
                     </a:p>
                   </a:txBody>
@@ -3803,7 +3803,7 @@
                         <a:rPr sz="900">
                           <a:latin typeface="Segoe UI"/>
                         </a:rPr>
-                        <a:t>Non-Fleet Bound Premium: $252,393.73</a:t>
+                        <a:t>Non-Fleet Bound Premium: $246,665.54</a:t>
                       </a:r>
                     </a:p>
                   </a:txBody>
@@ -3840,7 +3840,7 @@
                         <a:rPr sz="900">
                           <a:latin typeface="Segoe UI"/>
                         </a:rPr>
-                        <a:t>Non-Fleet Book %: 29.9%</a:t>
+                        <a:t>Non-Fleet Book %: 29.2%</a:t>
                       </a:r>
                     </a:p>
                   </a:txBody>
@@ -4428,7 +4428,7 @@
                           </a:solidFill>
                           <a:latin typeface="Segoe UI"/>
                         </a:rPr>
-                        <a:t>14</a:t>
+                        <a:t>15</a:t>
                       </a:r>
                     </a:p>
                   </a:txBody>
@@ -4707,7 +4707,7 @@
                           </a:solidFill>
                           <a:latin typeface="Segoe UI"/>
                         </a:rPr>
-                        <a:t>42.9%</a:t>
+                        <a:t>40.0%</a:t>
                       </a:r>
                     </a:p>
                   </a:txBody>

--- a/generated/Tier 1 Broker Scorecards/Surefire Insurance Agency Corp._Broker_Scorecard.pptx
+++ b/generated/Tier 1 Broker Scorecards/Surefire Insurance Agency Corp._Broker_Scorecard.pptx
@@ -3394,7 +3394,7 @@
                         <a:rPr sz="900">
                           <a:latin typeface="Segoe UI"/>
                         </a:rPr>
-                        <a:t>Tier 1  |  23.57% / 15.00%</a:t>
+                        <a:t>Tier 1  |  22.14% / 15.00%</a:t>
                       </a:r>
                     </a:p>
                   </a:txBody>
@@ -3653,7 +3653,7 @@
                         <a:rPr sz="900">
                           <a:latin typeface="Segoe UI"/>
                         </a:rPr>
-                        <a:t>Fleet Subs: 42  |  Binds: 13</a:t>
+                        <a:t>Fleet Subs: 42  |  Binds: 11</a:t>
                       </a:r>
                     </a:p>
                   </a:txBody>
@@ -3690,7 +3690,7 @@
                         <a:rPr sz="900">
                           <a:latin typeface="Segoe UI"/>
                         </a:rPr>
-                        <a:t>Fleet Bound Premium: $597,297.53</a:t>
+                        <a:t>Fleet Bound Premium: $565,713.17</a:t>
                       </a:r>
                     </a:p>
                   </a:txBody>
@@ -3727,7 +3727,7 @@
                         <a:rPr sz="900">
                           <a:latin typeface="Segoe UI"/>
                         </a:rPr>
-                        <a:t>Fleet Book %: 70.8%</a:t>
+                        <a:t>Fleet Book %: 67.0%</a:t>
                       </a:r>
                     </a:p>
                   </a:txBody>
@@ -3803,7 +3803,7 @@
                         <a:rPr sz="900">
                           <a:latin typeface="Segoe UI"/>
                         </a:rPr>
-                        <a:t>Non-Fleet Bound Premium: $246,665.54</a:t>
+                        <a:t>Non-Fleet Bound Premium: $278,249.90</a:t>
                       </a:r>
                     </a:p>
                   </a:txBody>
@@ -3840,7 +3840,7 @@
                         <a:rPr sz="900">
                           <a:latin typeface="Segoe UI"/>
                         </a:rPr>
-                        <a:t>Non-Fleet Book %: 29.2%</a:t>
+                        <a:t>Non-Fleet Book %: 33.0%</a:t>
                       </a:r>
                     </a:p>
                   </a:txBody>
@@ -4428,7 +4428,7 @@
                           </a:solidFill>
                           <a:latin typeface="Segoe UI"/>
                         </a:rPr>
-                        <a:t>15</a:t>
+                        <a:t>16</a:t>
                       </a:r>
                     </a:p>
                   </a:txBody>
@@ -4703,11 +4703,11 @@
                       <a:r>
                         <a:rPr sz="800">
                           <a:solidFill>
-                            <a:srgbClr val="059669"/>
+                            <a:srgbClr val="DC2626"/>
                           </a:solidFill>
                           <a:latin typeface="Segoe UI"/>
                         </a:rPr>
-                        <a:t>40.0%</a:t>
+                        <a:t>31.2%</a:t>
                       </a:r>
                     </a:p>
                   </a:txBody>
@@ -4983,7 +4983,7 @@
                           </a:solidFill>
                           <a:latin typeface="Segoe UI"/>
                         </a:rPr>
-                        <a:t>6</a:t>
+                        <a:t>5</a:t>
                       </a:r>
                     </a:p>
                   </a:txBody>
